--- a/Fase 1/Evidencias Grupales/Presentación Proyecto.pptx
+++ b/Fase 1/Evidencias Grupales/Presentación Proyecto.pptx
@@ -1012,7 +1012,7 @@
           <a:lstStyle/>
           <a:p>
             <a:r>
-              <a:t>Benjamín · ~60 s. El modelo es venta única llave en mano, con licencia perpetua, no suscripción mensual, a 45 millones de pesos. Los indicadores del estudio de viabilidad son sólidos: VAN positivo, TIR mensual de 9,44% y un payback de 2,65 meses. Una aclaración importante: este estudio se hizo con un horizonte de 4 meses en Evaluación de Proyectos, y no es el cronograma del Capstone, que son 18 semanas como vimos en la diapositiva del plan de trabajo.</a:t>
+              <a:t>Benjamín · ~45 s. El modelo es venta única, con licencia perpetua: el cliente lo compra una vez y lo incorpora como un activo propio, no como una suscripción mensual. La viabilidad no depende de explotarlo comercialmente de forma recurrente, sino de que evitar multas y accidentes ya justifica la inversión para una constructora. El precio exacto, el mercado y los indicadores financieros están en el estudio de viabilidad económica que hicimos en Evaluación de Proyectos — no es el foco de esta presentación.</a:t>
             </a:r>
           </a:p>
         </p:txBody>
@@ -12410,7 +12410,7 @@
                 </a:solidFill>
                 <a:latin typeface="Calibri"/>
               </a:rPr>
-              <a:t>Cómo se vende y por qué es viable</a:t>
+              <a:t>Venta única, no suscripción</a:t>
             </a:r>
           </a:p>
         </p:txBody>
@@ -12467,8 +12467,8 @@
         </p:nvSpPr>
         <p:spPr>
           <a:xfrm>
-            <a:off x="548640" y="1554480"/>
-            <a:ext cx="5486400" cy="365760"/>
+            <a:off x="548640" y="1600200"/>
+            <a:ext cx="10881360" cy="365760"/>
           </a:xfrm>
           <a:prstGeom prst="rect">
             <a:avLst/>
@@ -12487,13 +12487,13 @@
               </a:lnSpc>
             </a:pPr>
             <a:r>
-              <a:rPr sz="1400" b="1" i="0">
+              <a:rPr sz="1500" b="1" i="0">
                 <a:solidFill>
                   <a:srgbClr val="B45309"/>
                 </a:solidFill>
                 <a:latin typeface="Calibri"/>
               </a:rPr>
-              <a:t>Modelo comercial</a:t>
+              <a:t>Cómo funciona</a:t>
             </a:r>
           </a:p>
         </p:txBody>
@@ -12506,8 +12506,8 @@
         </p:nvSpPr>
         <p:spPr>
           <a:xfrm>
-            <a:off x="548640" y="1965960"/>
-            <a:ext cx="5486400" cy="1463040"/>
+            <a:off x="548640" y="2011680"/>
+            <a:ext cx="10881360" cy="1463040"/>
           </a:xfrm>
           <a:prstGeom prst="rect">
             <a:avLst/>
@@ -12522,14 +12522,14 @@
           <a:p>
             <a:pPr>
               <a:lnSpc>
-                <a:spcPct val="115000"/>
+                <a:spcPct val="120000"/>
               </a:lnSpc>
               <a:spcAft>
-                <a:spcPts val="1000"/>
+                <a:spcPts val="1400"/>
               </a:spcAft>
             </a:pPr>
             <a:r>
-              <a:rPr sz="1350" b="1">
+              <a:rPr sz="1650" b="1">
                 <a:solidFill>
                   <a:srgbClr val="B45309"/>
                 </a:solidFill>
@@ -12538,26 +12538,26 @@
               <a:t>›  </a:t>
             </a:r>
             <a:r>
-              <a:rPr sz="1350">
+              <a:rPr sz="1650">
                 <a:solidFill>
                   <a:srgbClr val="1F2937"/>
                 </a:solidFill>
                 <a:latin typeface="Calibri"/>
               </a:rPr>
-              <a:t>Venta única llave en mano, licencia perpetua (no suscripción).</a:t>
+              <a:t>Venta única, con licencia perpetua — no es un modelo de suscripción mensual.</a:t>
             </a:r>
           </a:p>
           <a:p>
             <a:pPr>
               <a:lnSpc>
-                <a:spcPct val="115000"/>
+                <a:spcPct val="120000"/>
               </a:lnSpc>
               <a:spcAft>
-                <a:spcPts val="1000"/>
+                <a:spcPts val="1400"/>
               </a:spcAft>
             </a:pPr>
             <a:r>
-              <a:rPr sz="1350" b="1">
+              <a:rPr sz="1650" b="1">
                 <a:solidFill>
                   <a:srgbClr val="B45309"/>
                 </a:solidFill>
@@ -12566,26 +12566,88 @@
               <a:t>›  </a:t>
             </a:r>
             <a:r>
-              <a:rPr sz="1350">
+              <a:rPr sz="1650">
                 <a:solidFill>
                   <a:srgbClr val="1F2937"/>
                 </a:solidFill>
                 <a:latin typeface="Calibri"/>
               </a:rPr>
-              <a:t>Precio: $45.000.000 CLP  ·  CAPEX: $12.000.000 CLP.</a:t>
-            </a:r>
-          </a:p>
+              <a:t>El cliente lo incorpora como un activo propio de la faena, sin cuotas recurrentes.</a:t>
+            </a:r>
+          </a:p>
+        </p:txBody>
+      </p:sp>
+      <p:sp>
+        <p:nvSpPr>
+          <p:cNvPr id="9" name="TextBox 8"/>
+          <p:cNvSpPr txBox="1"/>
+          <p:nvPr/>
+        </p:nvSpPr>
+        <p:spPr>
+          <a:xfrm>
+            <a:off x="548640" y="3520440"/>
+            <a:ext cx="10881360" cy="365760"/>
+          </a:xfrm>
+          <a:prstGeom prst="rect">
+            <a:avLst/>
+          </a:prstGeom>
+          <a:noFill/>
+        </p:spPr>
+        <p:txBody>
+          <a:bodyPr wrap="square" anchor="t" lIns="0" rIns="0" tIns="0" bIns="0">
+            <a:spAutoFit/>
+          </a:bodyPr>
+          <a:lstStyle/>
+          <a:p>
+            <a:pPr algn="l">
+              <a:lnSpc>
+                <a:spcPct val="100000"/>
+              </a:lnSpc>
+            </a:pPr>
+            <a:r>
+              <a:rPr sz="1500" b="1" i="0">
+                <a:solidFill>
+                  <a:srgbClr val="B45309"/>
+                </a:solidFill>
+                <a:latin typeface="Calibri"/>
+              </a:rPr>
+              <a:t>Por qué es viable</a:t>
+            </a:r>
+          </a:p>
+        </p:txBody>
+      </p:sp>
+      <p:sp>
+        <p:nvSpPr>
+          <p:cNvPr id="10" name="TextBox 9"/>
+          <p:cNvSpPr txBox="1"/>
+          <p:nvPr/>
+        </p:nvSpPr>
+        <p:spPr>
+          <a:xfrm>
+            <a:off x="548640" y="3931920"/>
+            <a:ext cx="10881360" cy="1463040"/>
+          </a:xfrm>
+          <a:prstGeom prst="rect">
+            <a:avLst/>
+          </a:prstGeom>
+          <a:noFill/>
+        </p:spPr>
+        <p:txBody>
+          <a:bodyPr wrap="square" lIns="0" rIns="0" tIns="0" bIns="0">
+            <a:spAutoFit/>
+          </a:bodyPr>
+          <a:lstStyle/>
           <a:p>
             <a:pPr>
               <a:lnSpc>
-                <a:spcPct val="115000"/>
+                <a:spcPct val="120000"/>
               </a:lnSpc>
               <a:spcAft>
-                <a:spcPts val="1000"/>
+                <a:spcPts val="1400"/>
               </a:spcAft>
             </a:pPr>
             <a:r>
-              <a:rPr sz="1350" b="1">
+              <a:rPr sz="1650" b="1">
                 <a:solidFill>
                   <a:srgbClr val="B45309"/>
                 </a:solidFill>
@@ -12594,31 +12656,59 @@
               <a:t>›  </a:t>
             </a:r>
             <a:r>
-              <a:rPr sz="1350">
+              <a:rPr sz="1650">
                 <a:solidFill>
                   <a:srgbClr val="1F2937"/>
                 </a:solidFill>
                 <a:latin typeface="Calibri"/>
               </a:rPr>
-              <a:t>Mercado: ~800 constructoras (primario) · ~200 mineras y concesionarias (secundario) · mutualidades como canal.</a:t>
-            </a:r>
-          </a:p>
-        </p:txBody>
-      </p:sp>
-      <p:sp>
-        <p:nvSpPr>
-          <p:cNvPr id="9" name="Rounded Rectangle 8"/>
+              <a:t>El valor se sostiene evitando el costo de multas, demandas y accidentes — no en una explotación comercial recurrente.</a:t>
+            </a:r>
+          </a:p>
+          <a:p>
+            <a:pPr>
+              <a:lnSpc>
+                <a:spcPct val="120000"/>
+              </a:lnSpc>
+              <a:spcAft>
+                <a:spcPts val="1400"/>
+              </a:spcAft>
+            </a:pPr>
+            <a:r>
+              <a:rPr sz="1650" b="1">
+                <a:solidFill>
+                  <a:srgbClr val="B45309"/>
+                </a:solidFill>
+                <a:latin typeface="Calibri"/>
+              </a:rPr>
+              <a:t>›  </a:t>
+            </a:r>
+            <a:r>
+              <a:rPr sz="1650">
+                <a:solidFill>
+                  <a:srgbClr val="1F2937"/>
+                </a:solidFill>
+                <a:latin typeface="Calibri"/>
+              </a:rPr>
+              <a:t>Se dirige a empresas constructoras que ya están obligadas a gestionar este riesgo laboral.</a:t>
+            </a:r>
+          </a:p>
+        </p:txBody>
+      </p:sp>
+      <p:sp>
+        <p:nvSpPr>
+          <p:cNvPr id="11" name="Rounded Rectangle 10"/>
           <p:cNvSpPr/>
           <p:nvPr/>
         </p:nvSpPr>
         <p:spPr>
           <a:xfrm>
-            <a:off x="548640" y="3657600"/>
-            <a:ext cx="2606040" cy="1051560"/>
+            <a:off x="548640" y="5440680"/>
+            <a:ext cx="11064240" cy="960120"/>
           </a:xfrm>
           <a:prstGeom prst="roundRect">
             <a:avLst>
-              <a:gd name="adj" fmla="val 10000"/>
+              <a:gd name="adj" fmla="val 8000"/>
             </a:avLst>
           </a:prstGeom>
           <a:solidFill>
@@ -12653,14 +12743,14 @@
       </p:sp>
       <p:sp>
         <p:nvSpPr>
-          <p:cNvPr id="10" name="TextBox 9"/>
+          <p:cNvPr id="12" name="TextBox 11"/>
           <p:cNvSpPr txBox="1"/>
           <p:nvPr/>
         </p:nvSpPr>
         <p:spPr>
           <a:xfrm>
-            <a:off x="548640" y="3749039"/>
-            <a:ext cx="2606040" cy="502920"/>
+            <a:off x="822960" y="5577840"/>
+            <a:ext cx="10515600" cy="731520"/>
           </a:xfrm>
           <a:prstGeom prst="rect">
             <a:avLst/>
@@ -12673,522 +12763,26 @@
           </a:bodyPr>
           <a:lstStyle/>
           <a:p>
-            <a:pPr algn="ctr">
-              <a:lnSpc>
-                <a:spcPct val="100000"/>
-              </a:lnSpc>
-            </a:pPr>
-            <a:r>
-              <a:rPr sz="2000" b="1" i="0">
-                <a:solidFill>
-                  <a:srgbClr val="B45309"/>
-                </a:solidFill>
-                <a:latin typeface="Calibri"/>
-              </a:rPr>
-              <a:t>$1.660.792</a:t>
-            </a:r>
-          </a:p>
-        </p:txBody>
-      </p:sp>
-      <p:sp>
-        <p:nvSpPr>
-          <p:cNvPr id="11" name="TextBox 10"/>
-          <p:cNvSpPr txBox="1"/>
-          <p:nvPr/>
-        </p:nvSpPr>
-        <p:spPr>
-          <a:xfrm>
-            <a:off x="548640" y="4251960"/>
-            <a:ext cx="2606040" cy="365760"/>
-          </a:xfrm>
-          <a:prstGeom prst="rect">
-            <a:avLst/>
-          </a:prstGeom>
-          <a:noFill/>
-        </p:spPr>
-        <p:txBody>
-          <a:bodyPr wrap="square" anchor="t" lIns="0" rIns="0" tIns="0" bIns="0">
-            <a:spAutoFit/>
-          </a:bodyPr>
-          <a:lstStyle/>
-          <a:p>
-            <a:pPr algn="ctr">
-              <a:lnSpc>
-                <a:spcPct val="100000"/>
-              </a:lnSpc>
-            </a:pPr>
-            <a:r>
-              <a:rPr sz="1100" b="0" i="0">
+            <a:pPr algn="l">
+              <a:lnSpc>
+                <a:spcPct val="120000"/>
+              </a:lnSpc>
+            </a:pPr>
+            <a:r>
+              <a:rPr sz="1250" b="0" i="1">
                 <a:solidFill>
                   <a:srgbClr val="6B7280"/>
                 </a:solidFill>
                 <a:latin typeface="Calibri"/>
               </a:rPr>
-              <a:t>VAN</a:t>
-            </a:r>
-          </a:p>
-        </p:txBody>
-      </p:sp>
-      <p:sp>
-        <p:nvSpPr>
-          <p:cNvPr id="12" name="Rounded Rectangle 11"/>
-          <p:cNvSpPr/>
-          <p:nvPr/>
-        </p:nvSpPr>
-        <p:spPr>
-          <a:xfrm>
-            <a:off x="3291840" y="3657600"/>
-            <a:ext cx="2606040" cy="1051560"/>
-          </a:xfrm>
-          <a:prstGeom prst="roundRect">
-            <a:avLst>
-              <a:gd name="adj" fmla="val 10000"/>
-            </a:avLst>
-          </a:prstGeom>
-          <a:solidFill>
-            <a:srgbClr val="F3F4F6"/>
-          </a:solidFill>
-          <a:ln>
-            <a:noFill/>
-          </a:ln>
-          <a:effectLst/>
-        </p:spPr>
-        <p:style>
-          <a:lnRef idx="1">
-            <a:schemeClr val="accent1"/>
-          </a:lnRef>
-          <a:fillRef idx="3">
-            <a:schemeClr val="accent1"/>
-          </a:fillRef>
-          <a:effectRef idx="2">
-            <a:schemeClr val="accent1"/>
-          </a:effectRef>
-          <a:fontRef idx="minor">
-            <a:schemeClr val="lt1"/>
-          </a:fontRef>
-        </p:style>
-        <p:txBody>
-          <a:bodyPr rtlCol="0" anchor="ctr"/>
-          <a:lstStyle/>
-          <a:p>
-            <a:pPr algn="ctr"/>
-          </a:p>
-        </p:txBody>
-      </p:sp>
-      <p:sp>
-        <p:nvSpPr>
-          <p:cNvPr id="13" name="TextBox 12"/>
-          <p:cNvSpPr txBox="1"/>
-          <p:nvPr/>
-        </p:nvSpPr>
-        <p:spPr>
-          <a:xfrm>
-            <a:off x="3291840" y="3749039"/>
-            <a:ext cx="2606040" cy="502920"/>
-          </a:xfrm>
-          <a:prstGeom prst="rect">
-            <a:avLst/>
-          </a:prstGeom>
-          <a:noFill/>
-        </p:spPr>
-        <p:txBody>
-          <a:bodyPr wrap="square" anchor="t" lIns="0" rIns="0" tIns="0" bIns="0">
-            <a:spAutoFit/>
-          </a:bodyPr>
-          <a:lstStyle/>
-          <a:p>
-            <a:pPr algn="ctr">
-              <a:lnSpc>
-                <a:spcPct val="100000"/>
-              </a:lnSpc>
-            </a:pPr>
-            <a:r>
-              <a:rPr sz="2000" b="1" i="0">
-                <a:solidFill>
-                  <a:srgbClr val="B45309"/>
-                </a:solidFill>
-                <a:latin typeface="Calibri"/>
-              </a:rPr>
-              <a:t>9,44%</a:t>
-            </a:r>
-          </a:p>
-        </p:txBody>
-      </p:sp>
-      <p:sp>
-        <p:nvSpPr>
-          <p:cNvPr id="14" name="TextBox 13"/>
-          <p:cNvSpPr txBox="1"/>
-          <p:nvPr/>
-        </p:nvSpPr>
-        <p:spPr>
-          <a:xfrm>
-            <a:off x="3291840" y="4251960"/>
-            <a:ext cx="2606040" cy="365760"/>
-          </a:xfrm>
-          <a:prstGeom prst="rect">
-            <a:avLst/>
-          </a:prstGeom>
-          <a:noFill/>
-        </p:spPr>
-        <p:txBody>
-          <a:bodyPr wrap="square" anchor="t" lIns="0" rIns="0" tIns="0" bIns="0">
-            <a:spAutoFit/>
-          </a:bodyPr>
-          <a:lstStyle/>
-          <a:p>
-            <a:pPr algn="ctr">
-              <a:lnSpc>
-                <a:spcPct val="100000"/>
-              </a:lnSpc>
-            </a:pPr>
-            <a:r>
-              <a:rPr sz="1100" b="0" i="0">
-                <a:solidFill>
-                  <a:srgbClr val="6B7280"/>
-                </a:solidFill>
-                <a:latin typeface="Calibri"/>
-              </a:rPr>
-              <a:t>TIR mensual</a:t>
-            </a:r>
-          </a:p>
-        </p:txBody>
-      </p:sp>
-      <p:sp>
-        <p:nvSpPr>
-          <p:cNvPr id="15" name="Rounded Rectangle 14"/>
-          <p:cNvSpPr/>
-          <p:nvPr/>
-        </p:nvSpPr>
-        <p:spPr>
-          <a:xfrm>
-            <a:off x="6035040" y="3657600"/>
-            <a:ext cx="2606040" cy="1051560"/>
-          </a:xfrm>
-          <a:prstGeom prst="roundRect">
-            <a:avLst>
-              <a:gd name="adj" fmla="val 10000"/>
-            </a:avLst>
-          </a:prstGeom>
-          <a:solidFill>
-            <a:srgbClr val="F3F4F6"/>
-          </a:solidFill>
-          <a:ln>
-            <a:noFill/>
-          </a:ln>
-          <a:effectLst/>
-        </p:spPr>
-        <p:style>
-          <a:lnRef idx="1">
-            <a:schemeClr val="accent1"/>
-          </a:lnRef>
-          <a:fillRef idx="3">
-            <a:schemeClr val="accent1"/>
-          </a:fillRef>
-          <a:effectRef idx="2">
-            <a:schemeClr val="accent1"/>
-          </a:effectRef>
-          <a:fontRef idx="minor">
-            <a:schemeClr val="lt1"/>
-          </a:fontRef>
-        </p:style>
-        <p:txBody>
-          <a:bodyPr rtlCol="0" anchor="ctr"/>
-          <a:lstStyle/>
-          <a:p>
-            <a:pPr algn="ctr"/>
-          </a:p>
-        </p:txBody>
-      </p:sp>
-      <p:sp>
-        <p:nvSpPr>
-          <p:cNvPr id="16" name="TextBox 15"/>
-          <p:cNvSpPr txBox="1"/>
-          <p:nvPr/>
-        </p:nvSpPr>
-        <p:spPr>
-          <a:xfrm>
-            <a:off x="6035040" y="3749039"/>
-            <a:ext cx="2606040" cy="502920"/>
-          </a:xfrm>
-          <a:prstGeom prst="rect">
-            <a:avLst/>
-          </a:prstGeom>
-          <a:noFill/>
-        </p:spPr>
-        <p:txBody>
-          <a:bodyPr wrap="square" anchor="t" lIns="0" rIns="0" tIns="0" bIns="0">
-            <a:spAutoFit/>
-          </a:bodyPr>
-          <a:lstStyle/>
-          <a:p>
-            <a:pPr algn="ctr">
-              <a:lnSpc>
-                <a:spcPct val="100000"/>
-              </a:lnSpc>
-            </a:pPr>
-            <a:r>
-              <a:rPr sz="2000" b="1" i="0">
-                <a:solidFill>
-                  <a:srgbClr val="B45309"/>
-                </a:solidFill>
-                <a:latin typeface="Calibri"/>
-              </a:rPr>
-              <a:t>2,65 meses</a:t>
-            </a:r>
-          </a:p>
-        </p:txBody>
-      </p:sp>
-      <p:sp>
-        <p:nvSpPr>
-          <p:cNvPr id="17" name="TextBox 16"/>
-          <p:cNvSpPr txBox="1"/>
-          <p:nvPr/>
-        </p:nvSpPr>
-        <p:spPr>
-          <a:xfrm>
-            <a:off x="6035040" y="4251960"/>
-            <a:ext cx="2606040" cy="365760"/>
-          </a:xfrm>
-          <a:prstGeom prst="rect">
-            <a:avLst/>
-          </a:prstGeom>
-          <a:noFill/>
-        </p:spPr>
-        <p:txBody>
-          <a:bodyPr wrap="square" anchor="t" lIns="0" rIns="0" tIns="0" bIns="0">
-            <a:spAutoFit/>
-          </a:bodyPr>
-          <a:lstStyle/>
-          <a:p>
-            <a:pPr algn="ctr">
-              <a:lnSpc>
-                <a:spcPct val="100000"/>
-              </a:lnSpc>
-            </a:pPr>
-            <a:r>
-              <a:rPr sz="1100" b="0" i="0">
-                <a:solidFill>
-                  <a:srgbClr val="6B7280"/>
-                </a:solidFill>
-                <a:latin typeface="Calibri"/>
-              </a:rPr>
-              <a:t>Payback</a:t>
-            </a:r>
-          </a:p>
-        </p:txBody>
-      </p:sp>
-      <p:sp>
-        <p:nvSpPr>
-          <p:cNvPr id="18" name="Rounded Rectangle 17"/>
-          <p:cNvSpPr/>
-          <p:nvPr/>
-        </p:nvSpPr>
-        <p:spPr>
-          <a:xfrm>
-            <a:off x="8778240" y="3657600"/>
-            <a:ext cx="2606040" cy="1051560"/>
-          </a:xfrm>
-          <a:prstGeom prst="roundRect">
-            <a:avLst>
-              <a:gd name="adj" fmla="val 10000"/>
-            </a:avLst>
-          </a:prstGeom>
-          <a:solidFill>
-            <a:srgbClr val="F3F4F6"/>
-          </a:solidFill>
-          <a:ln>
-            <a:noFill/>
-          </a:ln>
-          <a:effectLst/>
-        </p:spPr>
-        <p:style>
-          <a:lnRef idx="1">
-            <a:schemeClr val="accent1"/>
-          </a:lnRef>
-          <a:fillRef idx="3">
-            <a:schemeClr val="accent1"/>
-          </a:fillRef>
-          <a:effectRef idx="2">
-            <a:schemeClr val="accent1"/>
-          </a:effectRef>
-          <a:fontRef idx="minor">
-            <a:schemeClr val="lt1"/>
-          </a:fontRef>
-        </p:style>
-        <p:txBody>
-          <a:bodyPr rtlCol="0" anchor="ctr"/>
-          <a:lstStyle/>
-          <a:p>
-            <a:pPr algn="ctr"/>
-          </a:p>
-        </p:txBody>
-      </p:sp>
-      <p:sp>
-        <p:nvSpPr>
-          <p:cNvPr id="19" name="TextBox 18"/>
-          <p:cNvSpPr txBox="1"/>
-          <p:nvPr/>
-        </p:nvSpPr>
-        <p:spPr>
-          <a:xfrm>
-            <a:off x="8778240" y="3749039"/>
-            <a:ext cx="2606040" cy="502920"/>
-          </a:xfrm>
-          <a:prstGeom prst="rect">
-            <a:avLst/>
-          </a:prstGeom>
-          <a:noFill/>
-        </p:spPr>
-        <p:txBody>
-          <a:bodyPr wrap="square" anchor="t" lIns="0" rIns="0" tIns="0" bIns="0">
-            <a:spAutoFit/>
-          </a:bodyPr>
-          <a:lstStyle/>
-          <a:p>
-            <a:pPr algn="ctr">
-              <a:lnSpc>
-                <a:spcPct val="100000"/>
-              </a:lnSpc>
-            </a:pPr>
-            <a:r>
-              <a:rPr sz="2000" b="1" i="0">
-                <a:solidFill>
-                  <a:srgbClr val="B45309"/>
-                </a:solidFill>
-                <a:latin typeface="Calibri"/>
-              </a:rPr>
-              <a:t>92/100</a:t>
-            </a:r>
-          </a:p>
-        </p:txBody>
-      </p:sp>
-      <p:sp>
-        <p:nvSpPr>
-          <p:cNvPr id="20" name="TextBox 19"/>
-          <p:cNvSpPr txBox="1"/>
-          <p:nvPr/>
-        </p:nvSpPr>
-        <p:spPr>
-          <a:xfrm>
-            <a:off x="8778240" y="4251960"/>
-            <a:ext cx="2606040" cy="365760"/>
-          </a:xfrm>
-          <a:prstGeom prst="rect">
-            <a:avLst/>
-          </a:prstGeom>
-          <a:noFill/>
-        </p:spPr>
-        <p:txBody>
-          <a:bodyPr wrap="square" anchor="t" lIns="0" rIns="0" tIns="0" bIns="0">
-            <a:spAutoFit/>
-          </a:bodyPr>
-          <a:lstStyle/>
-          <a:p>
-            <a:pPr algn="ctr">
-              <a:lnSpc>
-                <a:spcPct val="100000"/>
-              </a:lnSpc>
-            </a:pPr>
-            <a:r>
-              <a:rPr sz="1100" b="0" i="0">
-                <a:solidFill>
-                  <a:srgbClr val="6B7280"/>
-                </a:solidFill>
-                <a:latin typeface="Calibri"/>
-              </a:rPr>
-              <a:t>Multicriterio</a:t>
-            </a:r>
-          </a:p>
-        </p:txBody>
-      </p:sp>
-      <p:sp>
-        <p:nvSpPr>
-          <p:cNvPr id="21" name="Rounded Rectangle 20"/>
-          <p:cNvSpPr/>
-          <p:nvPr/>
-        </p:nvSpPr>
-        <p:spPr>
-          <a:xfrm>
-            <a:off x="548640" y="4983480"/>
-            <a:ext cx="11064240" cy="1051560"/>
-          </a:xfrm>
-          <a:prstGeom prst="roundRect">
-            <a:avLst>
-              <a:gd name="adj" fmla="val 8000"/>
-            </a:avLst>
-          </a:prstGeom>
-          <a:solidFill>
-            <a:srgbClr val="FEF3C7"/>
-          </a:solidFill>
-          <a:ln>
-            <a:noFill/>
-          </a:ln>
-          <a:effectLst/>
-        </p:spPr>
-        <p:style>
-          <a:lnRef idx="1">
-            <a:schemeClr val="accent1"/>
-          </a:lnRef>
-          <a:fillRef idx="3">
-            <a:schemeClr val="accent1"/>
-          </a:fillRef>
-          <a:effectRef idx="2">
-            <a:schemeClr val="accent1"/>
-          </a:effectRef>
-          <a:fontRef idx="minor">
-            <a:schemeClr val="lt1"/>
-          </a:fontRef>
-        </p:style>
-        <p:txBody>
-          <a:bodyPr rtlCol="0" anchor="ctr"/>
-          <a:lstStyle/>
-          <a:p>
-            <a:pPr algn="ctr"/>
-          </a:p>
-        </p:txBody>
-      </p:sp>
-      <p:sp>
-        <p:nvSpPr>
-          <p:cNvPr id="22" name="TextBox 21"/>
-          <p:cNvSpPr txBox="1"/>
-          <p:nvPr/>
-        </p:nvSpPr>
-        <p:spPr>
-          <a:xfrm>
-            <a:off x="822960" y="5138928"/>
-            <a:ext cx="10515600" cy="822960"/>
-          </a:xfrm>
-          <a:prstGeom prst="rect">
-            <a:avLst/>
-          </a:prstGeom>
-          <a:noFill/>
-        </p:spPr>
-        <p:txBody>
-          <a:bodyPr wrap="square" anchor="t" lIns="0" rIns="0" tIns="0" bIns="0">
-            <a:spAutoFit/>
-          </a:bodyPr>
-          <a:lstStyle/>
-          <a:p>
-            <a:pPr algn="l">
-              <a:lnSpc>
-                <a:spcPct val="120000"/>
-              </a:lnSpc>
-            </a:pPr>
-            <a:r>
-              <a:rPr sz="1300" b="1" i="1">
-                <a:solidFill>
-                  <a:srgbClr val="111827"/>
-                </a:solidFill>
-                <a:latin typeface="Calibri"/>
-              </a:rPr>
-              <a:t>Estudio de viabilidad comercial heredado de Evaluación de Proyectos — horizonte de 4 meses. NO es el cronograma del Capstone (18 semanas, ver diapositiva 8).</a:t>
-            </a:r>
-          </a:p>
-        </p:txBody>
-      </p:sp>
-      <p:sp>
-        <p:nvSpPr>
-          <p:cNvPr id="23" name="Rectangle 22"/>
+              <a:t>El precio de venta, la segmentación de mercado y los indicadores financieros detallados pertenecen al estudio de viabilidad comercial heredado de Evaluación de Proyectos — fuera del alcance de esta presentación.</a:t>
+            </a:r>
+          </a:p>
+        </p:txBody>
+      </p:sp>
+      <p:sp>
+        <p:nvSpPr>
+          <p:cNvPr id="13" name="Rectangle 12"/>
           <p:cNvSpPr/>
           <p:nvPr/>
         </p:nvSpPr>
@@ -13232,7 +12826,7 @@
       </p:sp>
       <p:sp>
         <p:nvSpPr>
-          <p:cNvPr id="24" name="TextBox 23"/>
+          <p:cNvPr id="14" name="TextBox 13"/>
           <p:cNvSpPr txBox="1"/>
           <p:nvPr/>
         </p:nvSpPr>
@@ -13271,7 +12865,7 @@
       </p:sp>
       <p:sp>
         <p:nvSpPr>
-          <p:cNvPr id="25" name="TextBox 24"/>
+          <p:cNvPr id="15" name="TextBox 14"/>
           <p:cNvSpPr txBox="1"/>
           <p:nvPr/>
         </p:nvSpPr>
